--- a/Graphs/General workflow image/General workflow v13_unknown.pptx
+++ b/Graphs/General workflow image/General workflow v13_unknown.pptx
@@ -217,7 +217,7 @@
           <a:p>
             <a:fld id="{5D253B01-EE6D-4CBE-BDF8-35F5AB9D69BD}" type="datetimeFigureOut">
               <a:rPr lang="en-US" smtClean="0"/>
-              <a:t>5/5/2025</a:t>
+              <a:t>7/6/2025</a:t>
             </a:fld>
             <a:endParaRPr lang="en-US" dirty="0"/>
           </a:p>
@@ -728,7 +728,7 @@
           <a:p>
             <a:fld id="{1D69046E-0F48-469F-B64E-AD898842AE09}" type="datetimeFigureOut">
               <a:rPr lang="en-US" smtClean="0"/>
-              <a:t>5/5/2025</a:t>
+              <a:t>7/6/2025</a:t>
             </a:fld>
             <a:endParaRPr lang="en-US" dirty="0"/>
           </a:p>
@@ -898,7 +898,7 @@
           <a:p>
             <a:fld id="{1D69046E-0F48-469F-B64E-AD898842AE09}" type="datetimeFigureOut">
               <a:rPr lang="en-US" smtClean="0"/>
-              <a:t>5/5/2025</a:t>
+              <a:t>7/6/2025</a:t>
             </a:fld>
             <a:endParaRPr lang="en-US" dirty="0"/>
           </a:p>
@@ -1078,7 +1078,7 @@
           <a:p>
             <a:fld id="{1D69046E-0F48-469F-B64E-AD898842AE09}" type="datetimeFigureOut">
               <a:rPr lang="en-US" smtClean="0"/>
-              <a:t>5/5/2025</a:t>
+              <a:t>7/6/2025</a:t>
             </a:fld>
             <a:endParaRPr lang="en-US" dirty="0"/>
           </a:p>
@@ -1248,7 +1248,7 @@
           <a:p>
             <a:fld id="{1D69046E-0F48-469F-B64E-AD898842AE09}" type="datetimeFigureOut">
               <a:rPr lang="en-US" smtClean="0"/>
-              <a:t>5/5/2025</a:t>
+              <a:t>7/6/2025</a:t>
             </a:fld>
             <a:endParaRPr lang="en-US" dirty="0"/>
           </a:p>
@@ -1494,7 +1494,7 @@
           <a:p>
             <a:fld id="{1D69046E-0F48-469F-B64E-AD898842AE09}" type="datetimeFigureOut">
               <a:rPr lang="en-US" smtClean="0"/>
-              <a:t>5/5/2025</a:t>
+              <a:t>7/6/2025</a:t>
             </a:fld>
             <a:endParaRPr lang="en-US" dirty="0"/>
           </a:p>
@@ -1726,7 +1726,7 @@
           <a:p>
             <a:fld id="{1D69046E-0F48-469F-B64E-AD898842AE09}" type="datetimeFigureOut">
               <a:rPr lang="en-US" smtClean="0"/>
-              <a:t>5/5/2025</a:t>
+              <a:t>7/6/2025</a:t>
             </a:fld>
             <a:endParaRPr lang="en-US" dirty="0"/>
           </a:p>
@@ -2093,7 +2093,7 @@
           <a:p>
             <a:fld id="{1D69046E-0F48-469F-B64E-AD898842AE09}" type="datetimeFigureOut">
               <a:rPr lang="en-US" smtClean="0"/>
-              <a:t>5/5/2025</a:t>
+              <a:t>7/6/2025</a:t>
             </a:fld>
             <a:endParaRPr lang="en-US" dirty="0"/>
           </a:p>
@@ -2211,7 +2211,7 @@
           <a:p>
             <a:fld id="{1D69046E-0F48-469F-B64E-AD898842AE09}" type="datetimeFigureOut">
               <a:rPr lang="en-US" smtClean="0"/>
-              <a:t>5/5/2025</a:t>
+              <a:t>7/6/2025</a:t>
             </a:fld>
             <a:endParaRPr lang="en-US" dirty="0"/>
           </a:p>
@@ -2306,7 +2306,7 @@
           <a:p>
             <a:fld id="{1D69046E-0F48-469F-B64E-AD898842AE09}" type="datetimeFigureOut">
               <a:rPr lang="en-US" smtClean="0"/>
-              <a:t>5/5/2025</a:t>
+              <a:t>7/6/2025</a:t>
             </a:fld>
             <a:endParaRPr lang="en-US" dirty="0"/>
           </a:p>
@@ -2583,7 +2583,7 @@
           <a:p>
             <a:fld id="{1D69046E-0F48-469F-B64E-AD898842AE09}" type="datetimeFigureOut">
               <a:rPr lang="en-US" smtClean="0"/>
-              <a:t>5/5/2025</a:t>
+              <a:t>7/6/2025</a:t>
             </a:fld>
             <a:endParaRPr lang="en-US" dirty="0"/>
           </a:p>
@@ -2840,7 +2840,7 @@
           <a:p>
             <a:fld id="{1D69046E-0F48-469F-B64E-AD898842AE09}" type="datetimeFigureOut">
               <a:rPr lang="en-US" smtClean="0"/>
-              <a:t>5/5/2025</a:t>
+              <a:t>7/6/2025</a:t>
             </a:fld>
             <a:endParaRPr lang="en-US" dirty="0"/>
           </a:p>
@@ -3053,7 +3053,7 @@
           <a:p>
             <a:fld id="{1D69046E-0F48-469F-B64E-AD898842AE09}" type="datetimeFigureOut">
               <a:rPr lang="en-US" smtClean="0"/>
-              <a:t>5/5/2025</a:t>
+              <a:t>7/6/2025</a:t>
             </a:fld>
             <a:endParaRPr lang="en-US" dirty="0"/>
           </a:p>
@@ -8648,7 +8648,7 @@
                 <a:ea typeface="Lato" panose="020F0502020204030203" pitchFamily="34" charset="0"/>
                 <a:cs typeface="Lato" panose="020F0502020204030203" pitchFamily="34" charset="0"/>
               </a:rPr>
-              <a:t>Validation</a:t>
+              <a:t>Test</a:t>
             </a:r>
           </a:p>
         </p:txBody>
